--- a/Презентация тетриса.pptx
+++ b/Презентация тетриса.pptx
@@ -5,7 +5,7 @@
     <p:sldMasterId id="2147483677" r:id="rId1"/>
   </p:sldMasterIdLst>
   <p:notesMasterIdLst>
-    <p:notesMasterId r:id="rId8"/>
+    <p:notesMasterId r:id="rId9"/>
   </p:notesMasterIdLst>
   <p:sldIdLst>
     <p:sldId id="256" r:id="rId2"/>
@@ -14,33 +14,34 @@
     <p:sldId id="259" r:id="rId5"/>
     <p:sldId id="260" r:id="rId6"/>
     <p:sldId id="261" r:id="rId7"/>
+    <p:sldId id="262" r:id="rId8"/>
   </p:sldIdLst>
   <p:sldSz cx="12192000" cy="6858000"/>
   <p:notesSz cx="6858000" cy="12192000"/>
   <p:embeddedFontLst>
     <p:embeddedFont>
       <p:font typeface="Calibri" panose="020F0502020204030204" pitchFamily="34" charset="0"/>
-      <p:regular r:id="rId9"/>
-      <p:bold r:id="rId10"/>
-      <p:italic r:id="rId11"/>
-      <p:boldItalic r:id="rId12"/>
+      <p:regular r:id="rId10"/>
+      <p:bold r:id="rId11"/>
+      <p:italic r:id="rId12"/>
+      <p:boldItalic r:id="rId13"/>
     </p:embeddedFont>
     <p:embeddedFont>
       <p:font typeface="Calibri Light" panose="020F0302020204030204" pitchFamily="34" charset="0"/>
-      <p:regular r:id="rId13"/>
-      <p:italic r:id="rId14"/>
+      <p:regular r:id="rId14"/>
+      <p:italic r:id="rId15"/>
     </p:embeddedFont>
     <p:embeddedFont>
       <p:font typeface="Merriweather Bold" panose="020B0604020202020204" charset="-52"/>
-      <p:regular r:id="rId15"/>
+      <p:regular r:id="rId16"/>
     </p:embeddedFont>
     <p:embeddedFont>
       <p:font typeface="Open Sans" panose="020B0606030504020204" pitchFamily="34" charset="0"/>
-      <p:regular r:id="rId16"/>
+      <p:regular r:id="rId17"/>
     </p:embeddedFont>
     <p:embeddedFont>
       <p:font typeface="Open Sans Bold" panose="020B0806030504020204" charset="0"/>
-      <p:regular r:id="rId17"/>
+      <p:regular r:id="rId18"/>
     </p:embeddedFont>
   </p:embeddedFontLst>
   <p:defaultTextStyle>
@@ -906,7 +907,7 @@
           <a:p>
             <a:fld id="{D8DD1FDF-56EF-4993-9495-9872C9A9AABD}" type="datetimeFigureOut">
               <a:rPr lang="en-US" smtClean="0"/>
-              <a:t>9/22/2026</a:t>
+              <a:t>9/24/2026</a:t>
             </a:fld>
             <a:endParaRPr lang="en-US"/>
           </a:p>
@@ -1077,7 +1078,7 @@
           <a:p>
             <a:fld id="{D8DD1FDF-56EF-4993-9495-9872C9A9AABD}" type="datetimeFigureOut">
               <a:rPr lang="en-US" smtClean="0"/>
-              <a:t>9/22/2026</a:t>
+              <a:t>9/24/2026</a:t>
             </a:fld>
             <a:endParaRPr lang="en-US"/>
           </a:p>
@@ -1258,7 +1259,7 @@
           <a:p>
             <a:fld id="{D8DD1FDF-56EF-4993-9495-9872C9A9AABD}" type="datetimeFigureOut">
               <a:rPr lang="en-US" smtClean="0"/>
-              <a:t>9/22/2026</a:t>
+              <a:t>9/24/2026</a:t>
             </a:fld>
             <a:endParaRPr lang="en-US"/>
           </a:p>
@@ -1459,7 +1460,7 @@
           <a:p>
             <a:fld id="{D8DD1FDF-56EF-4993-9495-9872C9A9AABD}" type="datetimeFigureOut">
               <a:rPr lang="en-US" smtClean="0"/>
-              <a:t>9/22/2026</a:t>
+              <a:t>9/24/2026</a:t>
             </a:fld>
             <a:endParaRPr lang="en-US"/>
           </a:p>
@@ -1706,7 +1707,7 @@
           <a:p>
             <a:fld id="{D8DD1FDF-56EF-4993-9495-9872C9A9AABD}" type="datetimeFigureOut">
               <a:rPr lang="en-US" smtClean="0"/>
-              <a:t>9/22/2026</a:t>
+              <a:t>9/24/2026</a:t>
             </a:fld>
             <a:endParaRPr lang="en-US"/>
           </a:p>
@@ -1939,7 +1940,7 @@
           <a:p>
             <a:fld id="{D8DD1FDF-56EF-4993-9495-9872C9A9AABD}" type="datetimeFigureOut">
               <a:rPr lang="en-US" smtClean="0"/>
-              <a:t>9/22/2026</a:t>
+              <a:t>9/24/2026</a:t>
             </a:fld>
             <a:endParaRPr lang="en-US"/>
           </a:p>
@@ -2307,7 +2308,7 @@
           <a:p>
             <a:fld id="{D8DD1FDF-56EF-4993-9495-9872C9A9AABD}" type="datetimeFigureOut">
               <a:rPr lang="en-US" smtClean="0"/>
-              <a:t>9/22/2026</a:t>
+              <a:t>9/24/2026</a:t>
             </a:fld>
             <a:endParaRPr lang="en-US"/>
           </a:p>
@@ -2426,7 +2427,7 @@
           <a:p>
             <a:fld id="{D8DD1FDF-56EF-4993-9495-9872C9A9AABD}" type="datetimeFigureOut">
               <a:rPr lang="en-US" smtClean="0"/>
-              <a:t>9/22/2026</a:t>
+              <a:t>9/24/2026</a:t>
             </a:fld>
             <a:endParaRPr lang="en-US"/>
           </a:p>
@@ -2522,7 +2523,7 @@
           <a:p>
             <a:fld id="{D8DD1FDF-56EF-4993-9495-9872C9A9AABD}" type="datetimeFigureOut">
               <a:rPr lang="en-US" smtClean="0"/>
-              <a:t>9/22/2026</a:t>
+              <a:t>9/24/2026</a:t>
             </a:fld>
             <a:endParaRPr lang="en-US"/>
           </a:p>
@@ -2800,7 +2801,7 @@
           <a:p>
             <a:fld id="{D8DD1FDF-56EF-4993-9495-9872C9A9AABD}" type="datetimeFigureOut">
               <a:rPr lang="en-US" smtClean="0"/>
-              <a:t>9/22/2026</a:t>
+              <a:t>9/24/2026</a:t>
             </a:fld>
             <a:endParaRPr lang="en-US"/>
           </a:p>
@@ -3058,7 +3059,7 @@
           <a:p>
             <a:fld id="{D8DD1FDF-56EF-4993-9495-9872C9A9AABD}" type="datetimeFigureOut">
               <a:rPr lang="en-US" smtClean="0"/>
-              <a:t>9/22/2026</a:t>
+              <a:t>9/24/2026</a:t>
             </a:fld>
             <a:endParaRPr lang="en-US"/>
           </a:p>
@@ -3272,7 +3273,7 @@
           <a:p>
             <a:fld id="{D8DD1FDF-56EF-4993-9495-9872C9A9AABD}" type="datetimeFigureOut">
               <a:rPr lang="en-US" smtClean="0"/>
-              <a:t>9/22/2026</a:t>
+              <a:t>9/24/2026</a:t>
             </a:fld>
             <a:endParaRPr lang="en-US"/>
           </a:p>
@@ -6962,6 +6963,106 @@
         </p:spPr>
       </p:pic>
     </p:spTree>
+  </p:cSld>
+  <p:clrMapOvr>
+    <a:masterClrMapping/>
+  </p:clrMapOvr>
+</p:sld>
+</file>
+
+<file path=ppt/slides/slide7.xml><?xml version="1.0" encoding="utf-8"?>
+<p:sld xmlns:a="http://schemas.openxmlformats.org/drawingml/2006/main" xmlns:r="http://schemas.openxmlformats.org/officeDocument/2006/relationships" xmlns:p="http://schemas.openxmlformats.org/presentationml/2006/main">
+  <p:cSld>
+    <p:spTree>
+      <p:nvGrpSpPr>
+        <p:cNvPr id="1" name=""/>
+        <p:cNvGrpSpPr/>
+        <p:nvPr/>
+      </p:nvGrpSpPr>
+      <p:grpSpPr>
+        <a:xfrm>
+          <a:off x="0" y="0"/>
+          <a:ext cx="0" cy="0"/>
+          <a:chOff x="0" y="0"/>
+          <a:chExt cx="0" cy="0"/>
+        </a:xfrm>
+      </p:grpSpPr>
+      <p:sp>
+        <p:nvSpPr>
+          <p:cNvPr id="2" name="TextBox 1">
+            <a:extLst>
+              <a:ext uri="{FF2B5EF4-FFF2-40B4-BE49-F238E27FC236}">
+                <a16:creationId xmlns:a16="http://schemas.microsoft.com/office/drawing/2014/main" id="{91E1F358-2391-403F-B6D7-352661D4F379}"/>
+              </a:ext>
+            </a:extLst>
+          </p:cNvPr>
+          <p:cNvSpPr txBox="1"/>
+          <p:nvPr/>
+        </p:nvSpPr>
+        <p:spPr>
+          <a:xfrm>
+            <a:off x="683394" y="375385"/>
+            <a:ext cx="10818795" cy="646331"/>
+          </a:xfrm>
+          <a:prstGeom prst="rect">
+            <a:avLst/>
+          </a:prstGeom>
+          <a:noFill/>
+        </p:spPr>
+        <p:txBody>
+          <a:bodyPr wrap="square" rtlCol="0">
+            <a:spAutoFit/>
+          </a:bodyPr>
+          <a:lstStyle/>
+          <a:p>
+            <a:pPr algn="ctr"/>
+            <a:r>
+              <a:rPr lang="ru-RU" sz="3450" b="1" dirty="0"/>
+              <a:t>Ссылка на результат проекта в </a:t>
+            </a:r>
+            <a:r>
+              <a:rPr lang="en-US" sz="3450" b="1" dirty="0"/>
+              <a:t>GitHub</a:t>
+            </a:r>
+          </a:p>
+        </p:txBody>
+      </p:sp>
+      <p:pic>
+        <p:nvPicPr>
+          <p:cNvPr id="4" name="Рисунок 3">
+            <a:extLst>
+              <a:ext uri="{FF2B5EF4-FFF2-40B4-BE49-F238E27FC236}">
+                <a16:creationId xmlns:a16="http://schemas.microsoft.com/office/drawing/2014/main" id="{649B0DE9-C264-4533-B920-259023FA4CF2}"/>
+              </a:ext>
+            </a:extLst>
+          </p:cNvPr>
+          <p:cNvPicPr>
+            <a:picLocks noChangeAspect="1"/>
+          </p:cNvPicPr>
+          <p:nvPr/>
+        </p:nvPicPr>
+        <p:blipFill>
+          <a:blip r:embed="rId2"/>
+          <a:stretch>
+            <a:fillRect/>
+          </a:stretch>
+        </p:blipFill>
+        <p:spPr>
+          <a:xfrm>
+            <a:off x="4164531" y="1497532"/>
+            <a:ext cx="3862938" cy="3862936"/>
+          </a:xfrm>
+          <a:prstGeom prst="rect">
+            <a:avLst/>
+          </a:prstGeom>
+        </p:spPr>
+      </p:pic>
+    </p:spTree>
+    <p:extLst>
+      <p:ext uri="{BB962C8B-B14F-4D97-AF65-F5344CB8AC3E}">
+        <p14:creationId xmlns:p14="http://schemas.microsoft.com/office/powerpoint/2010/main" val="2893271369"/>
+      </p:ext>
+    </p:extLst>
   </p:cSld>
   <p:clrMapOvr>
     <a:masterClrMapping/>
